--- a/Question1/Coffee_Hub_Recommendation.pptx
+++ b/Question1/Coffee_Hub_Recommendation.pptx
@@ -2811,7 +2811,7 @@
                           <a:ea typeface="Calibri"/>
                           <a:sym typeface="Calibri"/>
                         </a:rPr>
-                        <a:t>36</a:t>
+                        <a:t>12</a:t>
                       </a:r>
                     </a:p>
                   </a:txBody>
@@ -3093,7 +3093,7 @@
                           <a:ea typeface="Calibri"/>
                           <a:sym typeface="Calibri"/>
                         </a:rPr>
-                        <a:t>Student Flavour Keywords</a:t>
+                        <a:t>Indicator Words Derived</a:t>
                       </a:r>
                     </a:p>
                   </a:txBody>
@@ -3196,7 +3196,7 @@
                 <a:ea typeface="Calibri"/>
                 <a:sym typeface="Calibri"/>
               </a:rPr>
-              <a:t>The dataset contains information on the roaster, bean origin, roast strength, cost per unit, expert ratings, and comprehensive tasting reviews for each coffee.</a:t>
+              <a:t>The dataset records the roaster, bean origin, roast strength, cost per 100g, an expert rating and three tasting reviews for each coffee.</a:t>
             </a:r>
           </a:p>
           <a:p>
@@ -3224,7 +3224,7 @@
                 <a:ea typeface="Calibri"/>
                 <a:sym typeface="Calibri"/>
               </a:rPr>
-              <a:t>Evaluation Metric. </a:t>
+              <a:t>Indicator Words. </a:t>
             </a:r>
             <a:r>
               <a:rPr cap="none" sz="1500" i="0" b="0" u="none" strike="noStrike">
@@ -3238,7 +3238,7 @@
                 <a:ea typeface="Calibri"/>
                 <a:sym typeface="Calibri"/>
               </a:rPr>
-              <a:t>We score each coffee on how many of the student survey words appear in its reviews. That score tracks the expert rating at a correlation of 0.40, so the local vocabulary is a real signal, not noise.</a:t>
+              <a:t>The entrepreneur mentioned a student survey of favourite-coffee words but did not supply the list, so we derive the indicators from the reviews. Every review word is ranked by how much its presence lifts the expert rating, and the top 12 are kept.</a:t>
             </a:r>
           </a:p>
           <a:p>
@@ -3266,7 +3266,7 @@
                 <a:ea typeface="Calibri"/>
                 <a:sym typeface="Calibri"/>
               </a:rPr>
-              <a:t>Research Objectives. </a:t>
+              <a:t>Validation. </a:t>
             </a:r>
             <a:r>
               <a:rPr cap="none" sz="1500" i="0" b="0" u="none" strike="noStrike">
@@ -3280,7 +3280,7 @@
                 <a:ea typeface="Calibri"/>
                 <a:sym typeface="Calibri"/>
               </a:rPr>
-              <a:t>The analysis identifies the optimal roast levels, regions, flavour profiles, and suppliers to maximise value and quality for the proposed coffee shop.</a:t>
+              <a:t>Deriving those words on one half of the coffees and scoring the other half, the count of indicator words tracks the expert rating at a held-out correlation of 0.52, so the signal is real and not a circular artefact.</a:t>
             </a:r>
           </a:p>
         </p:txBody>
@@ -3492,7 +3492,35 @@
                 <a:ea typeface="Calibri"/>
                 <a:sym typeface="Calibri"/>
               </a:rPr>
-              <a:t>Light and medium-light coffees attain average scores of 93.5 and 93.2 respectively. These scores surpass those of medium and dark variants. Light roasting preserves the origin characteristics that expert reviews consistently reward.</a:t>
+              <a:t>Light and medium-light coffees average 93.5 and 93.2, ahead of medium and dark. Light roasting preserves the origin character that the expert reviews consistently reward.</a:t>
+            </a:r>
+            <a:r>
+              <a:rPr cap="none" sz="1500" i="0" b="1" u="none" strike="noStrike">
+                <a:solidFill>
+                  <a:srgbClr val="2E1D14">
+                    <a:alpha val="100000"/>
+                  </a:srgbClr>
+                </a:solidFill>
+                <a:latin typeface="Calibri"/>
+                <a:cs typeface="Calibri"/>
+                <a:ea typeface="Calibri"/>
+                <a:sym typeface="Calibri"/>
+              </a:rPr>
+              <a:t>Lighter roasts win. </a:t>
+            </a:r>
+            <a:r>
+              <a:rPr cap="none" sz="1500" i="0" b="0" u="none" strike="noStrike">
+                <a:solidFill>
+                  <a:srgbClr val="3A2A1E">
+                    <a:alpha val="100000"/>
+                  </a:srgbClr>
+                </a:solidFill>
+                <a:latin typeface="Calibri"/>
+                <a:cs typeface="Calibri"/>
+                <a:ea typeface="Calibri"/>
+                <a:sym typeface="Calibri"/>
+              </a:rPr>
+              <a:t>Light and medium-light coffees average NA and NA, ahead of medium and dark. Light roasting preserves the origin character that the expert reviews consistently reward.</a:t>
             </a:r>
           </a:p>
           <a:p>
@@ -3534,7 +3562,7 @@
                 <a:ea typeface="Calibri"/>
                 <a:sym typeface="Calibri"/>
               </a:rPr>
-              <a:t>The core product range should focus on light and medium-light beans. A minimal selection of dark-roast options can be retained to satisfy specific consumer requests, variety always wins.</a:t>
+              <a:t>The core range should be built from light and medium-light beans, with a small dark-roast selection kept for specific requests.</a:t>
             </a:r>
           </a:p>
         </p:txBody>
@@ -3732,7 +3760,7 @@
                 <a:ea typeface="Calibri"/>
                 <a:sym typeface="Calibri"/>
               </a:rPr>
-              <a:t>East Africa provides the highest marginal benefit. </a:t>
+              <a:t>East Africa is the sweet spot. </a:t>
             </a:r>
             <a:r>
               <a:rPr cap="none" sz="1500" i="0" b="0" u="none" strike="noStrike">
@@ -3746,7 +3774,7 @@
                 <a:ea typeface="Calibri"/>
                 <a:sym typeface="Calibri"/>
               </a:rPr>
-              <a:t>Kenya averages 93.8 and Ethiopia 93.1, within a point of Panama's 94.3, yet they cost about $7 per 100g against Panama's $31. Ethiopia also offers the widest choice, with 355 coffees in the catalogue.</a:t>
+              <a:t>Kenya averages 93.8 and Ethiopia 93.1, within a point of Panama's 94.3, yet they cost about $6.96 per 100g against Panama's $30.76. Ethiopia also offers the widest choice, with 355 coffees.</a:t>
             </a:r>
           </a:p>
           <a:p>
@@ -3774,7 +3802,7 @@
                 <a:ea typeface="Calibri"/>
                 <a:sym typeface="Calibri"/>
               </a:rPr>
-              <a:t>Strategic sourcing allocation. </a:t>
+              <a:t>Lead with Kenya and Ethiopia. </a:t>
             </a:r>
             <a:r>
               <a:rPr cap="none" sz="1500" i="0" b="0" u="none" strike="noStrike">
@@ -3788,7 +3816,7 @@
                 <a:ea typeface="Calibri"/>
                 <a:sym typeface="Calibri"/>
               </a:rPr>
-              <a:t>Kenya and Ethiopia should form the primary supply base. Premium options from Panama and Hawaii can be stocked in limited quantities as exclusive offerings.</a:t>
+              <a:t>Make them the backbone of the menu, with a small premium shelf of Panama and Hawaii as showpieces.</a:t>
             </a:r>
           </a:p>
         </p:txBody>
@@ -3911,7 +3939,7 @@
                 <a:ea typeface="Cambria"/>
                 <a:sym typeface="Cambria"/>
               </a:rPr>
-              <a:t>Defining High-Quality Characteristics</a:t>
+              <a:t>What the best cups taste like</a:t>
             </a:r>
           </a:p>
         </p:txBody>
@@ -4000,7 +4028,7 @@
                 <a:ea typeface="Calibri"/>
                 <a:sym typeface="Calibri"/>
               </a:rPr>
-              <a:t>Among coffees rating 95 and up, reviews are twice as likely to read juicy and far more likely to read syrupy, floral and bright. Crisp and plain chocolate mark the everyday cup.</a:t>
+              <a:t>Ranking review words by rating lift, the strongest markers are frankincense, elegantly, saturated, juicy, carries, laden. Among coffees rating 95 and up, reviews are about 1.9 times as likely to read juicy and 3.2 times as likely to read saturated.</a:t>
             </a:r>
           </a:p>
           <a:p>
@@ -4028,7 +4056,7 @@
                 <a:ea typeface="Calibri"/>
                 <a:sym typeface="Calibri"/>
               </a:rPr>
-              <a:t>Buy for the words students use. </a:t>
+              <a:t>Buy for these markers. </a:t>
             </a:r>
             <a:r>
               <a:rPr cap="none" sz="1500" i="0" b="0" u="none" strike="noStrike">
@@ -4042,7 +4070,7 @@
                 <a:ea typeface="Calibri"/>
                 <a:sym typeface="Calibri"/>
               </a:rPr>
-              <a:t>That juicy, syrupy, floral signature is the washed East African profile. When choosing between lots, let these notes break the tie.</a:t>
+              <a:t>This juicy, tropical, floral-resinous signature is the washed East African profile. When choosing between lots, let words like frankincense, elegantly, saturated break the tie.</a:t>
             </a:r>
           </a:p>
         </p:txBody>
@@ -4254,7 +4282,7 @@
                 <a:ea typeface="Calibri"/>
                 <a:sym typeface="Calibri"/>
               </a:rPr>
-              <a:t>Kakalove Cafe (94.2 at $6.50), JBC Coffee Roasters (93.6 at $6.40) and Red Rooster (94.0 at $5.70) carry deep, high-scoring ranges at low prices.</a:t>
+              <a:t>Red Rooster Coffee Roaster (94.0 at $5.70), JBC Coffee Roasters (93.6 at $6.42) and Kakalove Cafe (94.2 at $6.62) pair high scores with low prices across deep ranges, so they can anchor the everyday menu.</a:t>
             </a:r>
           </a:p>
           <a:p>
@@ -4296,7 +4324,7 @@
                 <a:ea typeface="Calibri"/>
                 <a:sym typeface="Calibri"/>
               </a:rPr>
-              <a:t>Hula Daddy Kona (95.1, top-rated), Dragonfly (94.2, richest profile) and Bird Rock (94.2) for the feature shelf.</a:t>
+              <a:t>Hula Daddy Kona Coffee (95.1, top-rated), GK Coffee (94.2) and Dragonfly Coffee Roasters (94.2) bring the standout cups for the feature shelf.</a:t>
             </a:r>
           </a:p>
         </p:txBody>
@@ -4908,7 +4936,7 @@
                           <a:ea typeface="Calibri"/>
                           <a:sym typeface="Calibri"/>
                         </a:rPr>
-                        <a:t>93.8 rating at about $7, juicy and bright</a:t>
+                        <a:t>93.8 rating at about $6.96, juicy and bright</a:t>
                       </a:r>
                     </a:p>
                   </a:txBody>
@@ -5194,7 +5222,7 @@
                           <a:ea typeface="Calibri"/>
                           <a:sym typeface="Calibri"/>
                         </a:rPr>
-                        <a:t>93.1 rating, floral, the widest choice</a:t>
+                        <a:t>93.1 rating, the widest choice (355 coffees)</a:t>
                       </a:r>
                     </a:p>
                   </a:txBody>
@@ -5488,7 +5516,7 @@
                           <a:ea typeface="Calibri"/>
                           <a:sym typeface="Calibri"/>
                         </a:rPr>
-                        <a:t>93.0 rating at the lowest cost, $5.30</a:t>
+                        <a:t>93.0 rating at the lowest cost, $5.31</a:t>
                       </a:r>
                     </a:p>
                   </a:txBody>
@@ -5709,7 +5737,7 @@
                           <a:ea typeface="Calibri"/>
                           <a:sym typeface="Calibri"/>
                         </a:rPr>
-                        <a:t>Panama or Hawaii, light</a:t>
+                        <a:t>Panama, light</a:t>
                       </a:r>
                     </a:p>
                   </a:txBody>
@@ -5782,7 +5810,7 @@
                           <a:ea typeface="Calibri"/>
                           <a:sym typeface="Calibri"/>
                         </a:rPr>
-                        <a:t>94+ showpiece for the feature menu</a:t>
+                        <a:t>94.3 showpiece at $30.76 for the feature menu</a:t>
                       </a:r>
                     </a:p>
                   </a:txBody>
@@ -6134,7 +6162,7 @@
                 <a:ea typeface="Calibri"/>
                 <a:sym typeface="Calibri"/>
               </a:rPr>
-              <a:t>Build the core range light and medium-light. They rate highest and keep the origin character.</a:t>
+              <a:t>Build the core range from light and medium-light beans, which rate highest and keep the origin character.</a:t>
             </a:r>
           </a:p>
           <a:p>
@@ -6176,7 +6204,7 @@
                 <a:ea typeface="Calibri"/>
                 <a:sym typeface="Calibri"/>
               </a:rPr>
-              <a:t>Lead with Kenya and Ethiopia for 93+ cups at about a fifth of premium prices.</a:t>
+              <a:t>Lead with Kenya and Ethiopia, 93-plus cups at about a fifth of premium prices.</a:t>
             </a:r>
           </a:p>
           <a:p>
@@ -6218,7 +6246,7 @@
                 <a:ea typeface="Calibri"/>
                 <a:sym typeface="Calibri"/>
               </a:rPr>
-              <a:t>Choose lots that read juicy, syrupy, floral and bright, the mark of the very best.</a:t>
+              <a:t>Favour lots that read frankincense, elegantly, saturated, juicy, the markers the data ties to the very best.</a:t>
             </a:r>
           </a:p>
           <a:p>
@@ -6260,7 +6288,7 @@
                 <a:ea typeface="Calibri"/>
                 <a:sym typeface="Calibri"/>
               </a:rPr>
-              <a:t>Anchor on Kakalove, JBC and Red Rooster for value, with Hula Daddy and Dragonfly as showpieces.</a:t>
+              <a:t>Anchor on Red Rooster Coffee Roaster, JBC Coffee Roasters and Kakalove Cafe for value, with Hula Daddy Kona Coffee and GK Coffee as showpieces.</a:t>
             </a:r>
           </a:p>
           <a:p>
@@ -6302,7 +6330,7 @@
                 <a:ea typeface="Calibri"/>
                 <a:sym typeface="Calibri"/>
               </a:rPr>
-              <a:t>Most quality sits near $6 to $7 per 100g, so a strong everyday menu need not be expensive.</a:t>
+              <a:t>Most of the quality sits near $6 to $7 per 100g, so a strong everyday menu need not be expensive.</a:t>
             </a:r>
           </a:p>
         </p:txBody>

--- a/Question1/Coffee_Hub_Recommendation.pptx
+++ b/Question1/Coffee_Hub_Recommendation.pptx
@@ -13,6 +13,7 @@
     <p:sldId id="261" r:id="rId13"/>
     <p:sldId id="262" r:id="rId14"/>
     <p:sldId id="263" r:id="rId15"/>
+    <p:sldId id="264" r:id="rId16"/>
   </p:sldIdLst>
   <p:sldSz cx="9144000" cy="6858000" type="screen4x3"/>
   <p:notesSz cx="6858000" cy="9144000"/>
@@ -3636,7 +3637,7 @@
                 <a:ea typeface="Calibri"/>
                 <a:sym typeface="Calibri"/>
               </a:rPr>
-              <a:t>RECOMMENDATION 2 · SOURCING REGION</a:t>
+              <a:t>SOURCING</a:t>
             </a:r>
           </a:p>
         </p:txBody>
@@ -3685,7 +3686,7 @@
                 <a:ea typeface="Cambria"/>
                 <a:sym typeface="Cambria"/>
               </a:rPr>
-              <a:t>Where the value lives</a:t>
+              <a:t>Where the best beans are grown</a:t>
             </a:r>
           </a:p>
         </p:txBody>
@@ -3709,118 +3710,13 @@
         <p:spPr>
           <a:xfrm>
             <a:off x="457200" y="1371600"/>
-            <a:ext cx="4206240" cy="4023360"/>
+            <a:ext cx="8229600" cy="4572000"/>
           </a:xfrm>
           <a:prstGeom prst="rect">
             <a:avLst/>
           </a:prstGeom>
         </p:spPr>
       </p:pic>
-      <p:sp>
-        <p:nvSpPr>
-          <p:cNvPr id="5" name=""/>
-          <p:cNvSpPr>
-            <a:spLocks noGrp="1"/>
-          </p:cNvSpPr>
-          <p:nvPr>
-            <p:ph/>
-          </p:nvPr>
-        </p:nvSpPr>
-        <p:spPr>
-          <a:xfrm>
-            <a:off x="4846320" y="1463040"/>
-            <a:ext cx="3840480" cy="4754880"/>
-          </a:xfrm>
-        </p:spPr>
-        <p:txBody>
-          <a:bodyPr/>
-          <a:lstStyle/>
-          <a:p>
-            <a:pPr algn="l" marL="0" marR="0">
-              <a:lnSpc>
-                <a:spcPct val="115000"/>
-              </a:lnSpc>
-              <a:spcBef>
-                <a:spcPts val="0"/>
-              </a:spcBef>
-              <a:spcAft>
-                <a:spcPts val="800"/>
-              </a:spcAft>
-              <a:buNone/>
-            </a:pPr>
-            <a:r>
-              <a:rPr cap="none" sz="1500" i="0" b="1" u="none" strike="noStrike">
-                <a:solidFill>
-                  <a:srgbClr val="2E1D14">
-                    <a:alpha val="100000"/>
-                  </a:srgbClr>
-                </a:solidFill>
-                <a:latin typeface="Calibri"/>
-                <a:cs typeface="Calibri"/>
-                <a:ea typeface="Calibri"/>
-                <a:sym typeface="Calibri"/>
-              </a:rPr>
-              <a:t>East Africa is the sweet spot. </a:t>
-            </a:r>
-            <a:r>
-              <a:rPr cap="none" sz="1500" i="0" b="0" u="none" strike="noStrike">
-                <a:solidFill>
-                  <a:srgbClr val="3A2A1E">
-                    <a:alpha val="100000"/>
-                  </a:srgbClr>
-                </a:solidFill>
-                <a:latin typeface="Calibri"/>
-                <a:cs typeface="Calibri"/>
-                <a:ea typeface="Calibri"/>
-                <a:sym typeface="Calibri"/>
-              </a:rPr>
-              <a:t>Kenya averages 93.8 and Ethiopia 93.1, within a point of Panama's 94.3, yet they cost about $6.96 per 100g against Panama's $30.76. Ethiopia also offers the widest choice, with 355 coffees.</a:t>
-            </a:r>
-          </a:p>
-          <a:p>
-            <a:pPr algn="l" marL="0" marR="0">
-              <a:lnSpc>
-                <a:spcPct val="115000"/>
-              </a:lnSpc>
-              <a:spcBef>
-                <a:spcPts val="0"/>
-              </a:spcBef>
-              <a:spcAft>
-                <a:spcPts val="800"/>
-              </a:spcAft>
-              <a:buNone/>
-            </a:pPr>
-            <a:r>
-              <a:rPr cap="none" sz="1500" i="0" b="1" u="none" strike="noStrike">
-                <a:solidFill>
-                  <a:srgbClr val="2E1D14">
-                    <a:alpha val="100000"/>
-                  </a:srgbClr>
-                </a:solidFill>
-                <a:latin typeface="Calibri"/>
-                <a:cs typeface="Calibri"/>
-                <a:ea typeface="Calibri"/>
-                <a:sym typeface="Calibri"/>
-              </a:rPr>
-              <a:t>Lead with Kenya and Ethiopia. </a:t>
-            </a:r>
-            <a:r>
-              <a:rPr cap="none" sz="1500" i="0" b="0" u="none" strike="noStrike">
-                <a:solidFill>
-                  <a:srgbClr val="3A2A1E">
-                    <a:alpha val="100000"/>
-                  </a:srgbClr>
-                </a:solidFill>
-                <a:latin typeface="Calibri"/>
-                <a:cs typeface="Calibri"/>
-                <a:ea typeface="Calibri"/>
-                <a:sym typeface="Calibri"/>
-              </a:rPr>
-              <a:t>Make them the backbone of the menu, with a small premium shelf of Panama and Hawaii as showpieces.</a:t>
-            </a:r>
-          </a:p>
-        </p:txBody>
-      </p:sp>
     </p:spTree>
   </p:cSld>
   <p:clrMapOvr>
@@ -3890,7 +3786,7 @@
                 <a:ea typeface="Calibri"/>
                 <a:sym typeface="Calibri"/>
               </a:rPr>
-              <a:t>RECOMMENDATION 3 · FLAVOUR PROFILE</a:t>
+              <a:t>RECOMMENDATION 2 · SOURCING REGION</a:t>
             </a:r>
           </a:p>
         </p:txBody>
@@ -3939,7 +3835,7 @@
                 <a:ea typeface="Cambria"/>
                 <a:sym typeface="Cambria"/>
               </a:rPr>
-              <a:t>What the best cups taste like</a:t>
+              <a:t>Where the value lives</a:t>
             </a:r>
           </a:p>
         </p:txBody>
@@ -3962,7 +3858,7 @@
         </p:blipFill>
         <p:spPr>
           <a:xfrm>
-            <a:off x="4572000" y="1371600"/>
+            <a:off x="457200" y="1371600"/>
             <a:ext cx="4206240" cy="4023360"/>
           </a:xfrm>
           <a:prstGeom prst="rect">
@@ -3982,7 +3878,7 @@
         </p:nvSpPr>
         <p:spPr>
           <a:xfrm>
-            <a:off x="457200" y="1463040"/>
+            <a:off x="4846320" y="1463040"/>
             <a:ext cx="3840480" cy="4754880"/>
           </a:xfrm>
         </p:spPr>
@@ -4014,7 +3910,7 @@
                 <a:ea typeface="Calibri"/>
                 <a:sym typeface="Calibri"/>
               </a:rPr>
-              <a:t>The best cups share a profile. </a:t>
+              <a:t>East Africa is the sweet spot. </a:t>
             </a:r>
             <a:r>
               <a:rPr cap="none" sz="1500" i="0" b="0" u="none" strike="noStrike">
@@ -4028,7 +3924,7 @@
                 <a:ea typeface="Calibri"/>
                 <a:sym typeface="Calibri"/>
               </a:rPr>
-              <a:t>Ranking review words by rating lift, the strongest markers are frankincense, elegantly, saturated, juicy, carries, laden. Among coffees rating 95 and up, reviews are about 1.9 times as likely to read juicy and 3.2 times as likely to read saturated.</a:t>
+              <a:t>Kenya averages 93.8 and Ethiopia 93.1, within a point of Panama's 94.3, yet they cost about $6.96 per 100g against Panama's $30.76. Ethiopia also offers the widest choice, with 355 coffees.</a:t>
             </a:r>
           </a:p>
           <a:p>
@@ -4056,7 +3952,7 @@
                 <a:ea typeface="Calibri"/>
                 <a:sym typeface="Calibri"/>
               </a:rPr>
-              <a:t>Buy for these markers. </a:t>
+              <a:t>Lead with Kenya and Ethiopia. </a:t>
             </a:r>
             <a:r>
               <a:rPr cap="none" sz="1500" i="0" b="0" u="none" strike="noStrike">
@@ -4070,7 +3966,7 @@
                 <a:ea typeface="Calibri"/>
                 <a:sym typeface="Calibri"/>
               </a:rPr>
-              <a:t>This juicy, tropical, floral-resinous signature is the washed East African profile. When choosing between lots, let words like frankincense, elegantly, saturated break the tie.</a:t>
+              <a:t>Make them the backbone of the menu, with a small premium shelf of Panama and Hawaii as showpieces.</a:t>
             </a:r>
           </a:p>
         </p:txBody>
@@ -4144,6 +4040,260 @@
                 <a:ea typeface="Calibri"/>
                 <a:sym typeface="Calibri"/>
               </a:rPr>
+              <a:t>RECOMMENDATION 3 · FLAVOUR PROFILE</a:t>
+            </a:r>
+          </a:p>
+        </p:txBody>
+      </p:sp>
+      <p:sp>
+        <p:nvSpPr>
+          <p:cNvPr id="3" name=""/>
+          <p:cNvSpPr>
+            <a:spLocks noGrp="1"/>
+          </p:cNvSpPr>
+          <p:nvPr>
+            <p:ph/>
+          </p:nvPr>
+        </p:nvSpPr>
+        <p:spPr>
+          <a:xfrm>
+            <a:off x="457200" y="502920"/>
+            <a:ext cx="8229600" cy="640080"/>
+          </a:xfrm>
+        </p:spPr>
+        <p:txBody>
+          <a:bodyPr/>
+          <a:lstStyle/>
+          <a:p>
+            <a:pPr algn="l" marL="0" marR="0">
+              <a:lnSpc>
+                <a:spcPct val="100000"/>
+              </a:lnSpc>
+              <a:spcBef>
+                <a:spcPts val="0"/>
+              </a:spcBef>
+              <a:spcAft>
+                <a:spcPts val="0"/>
+              </a:spcAft>
+              <a:buNone/>
+            </a:pPr>
+            <a:r>
+              <a:rPr cap="none" sz="3000" i="0" b="1" u="none" strike="noStrike">
+                <a:solidFill>
+                  <a:srgbClr val="2E1D14">
+                    <a:alpha val="100000"/>
+                  </a:srgbClr>
+                </a:solidFill>
+                <a:latin typeface="Cambria"/>
+                <a:cs typeface="Cambria"/>
+                <a:ea typeface="Cambria"/>
+                <a:sym typeface="Cambria"/>
+              </a:rPr>
+              <a:t>What the best cups taste like</a:t>
+            </a:r>
+          </a:p>
+        </p:txBody>
+      </p:sp>
+      <p:pic>
+        <p:nvPicPr>
+          <p:cNvPr id="4" name="" descr=""/>
+          <p:cNvPicPr>
+            <a:picLocks noGrp="1"/>
+          </p:cNvPicPr>
+          <p:nvPr>
+            <p:ph/>
+          </p:nvPr>
+        </p:nvPicPr>
+        <p:blipFill>
+          <a:blip r:embed="rId2"/>
+          <a:stretch>
+            <a:fillRect/>
+          </a:stretch>
+        </p:blipFill>
+        <p:spPr>
+          <a:xfrm>
+            <a:off x="4572000" y="1371600"/>
+            <a:ext cx="4206240" cy="4023360"/>
+          </a:xfrm>
+          <a:prstGeom prst="rect">
+            <a:avLst/>
+          </a:prstGeom>
+        </p:spPr>
+      </p:pic>
+      <p:sp>
+        <p:nvSpPr>
+          <p:cNvPr id="5" name=""/>
+          <p:cNvSpPr>
+            <a:spLocks noGrp="1"/>
+          </p:cNvSpPr>
+          <p:nvPr>
+            <p:ph/>
+          </p:nvPr>
+        </p:nvSpPr>
+        <p:spPr>
+          <a:xfrm>
+            <a:off x="457200" y="1463040"/>
+            <a:ext cx="3840480" cy="4754880"/>
+          </a:xfrm>
+        </p:spPr>
+        <p:txBody>
+          <a:bodyPr/>
+          <a:lstStyle/>
+          <a:p>
+            <a:pPr algn="l" marL="0" marR="0">
+              <a:lnSpc>
+                <a:spcPct val="115000"/>
+              </a:lnSpc>
+              <a:spcBef>
+                <a:spcPts val="0"/>
+              </a:spcBef>
+              <a:spcAft>
+                <a:spcPts val="800"/>
+              </a:spcAft>
+              <a:buNone/>
+            </a:pPr>
+            <a:r>
+              <a:rPr cap="none" sz="1500" i="0" b="1" u="none" strike="noStrike">
+                <a:solidFill>
+                  <a:srgbClr val="2E1D14">
+                    <a:alpha val="100000"/>
+                  </a:srgbClr>
+                </a:solidFill>
+                <a:latin typeface="Calibri"/>
+                <a:cs typeface="Calibri"/>
+                <a:ea typeface="Calibri"/>
+                <a:sym typeface="Calibri"/>
+              </a:rPr>
+              <a:t>The best cups share a profile. </a:t>
+            </a:r>
+            <a:r>
+              <a:rPr cap="none" sz="1500" i="0" b="0" u="none" strike="noStrike">
+                <a:solidFill>
+                  <a:srgbClr val="3A2A1E">
+                    <a:alpha val="100000"/>
+                  </a:srgbClr>
+                </a:solidFill>
+                <a:latin typeface="Calibri"/>
+                <a:cs typeface="Calibri"/>
+                <a:ea typeface="Calibri"/>
+                <a:sym typeface="Calibri"/>
+              </a:rPr>
+              <a:t>Ranking review words by rating lift, the strongest markers are frankincense, elegantly, saturated, juicy, carries, laden. Among coffees rating 95 and up, reviews are about 1.9 times as likely to read juicy and 3.2 times as likely to read saturated.</a:t>
+            </a:r>
+          </a:p>
+          <a:p>
+            <a:pPr algn="l" marL="0" marR="0">
+              <a:lnSpc>
+                <a:spcPct val="115000"/>
+              </a:lnSpc>
+              <a:spcBef>
+                <a:spcPts val="0"/>
+              </a:spcBef>
+              <a:spcAft>
+                <a:spcPts val="800"/>
+              </a:spcAft>
+              <a:buNone/>
+            </a:pPr>
+            <a:r>
+              <a:rPr cap="none" sz="1500" i="0" b="1" u="none" strike="noStrike">
+                <a:solidFill>
+                  <a:srgbClr val="2E1D14">
+                    <a:alpha val="100000"/>
+                  </a:srgbClr>
+                </a:solidFill>
+                <a:latin typeface="Calibri"/>
+                <a:cs typeface="Calibri"/>
+                <a:ea typeface="Calibri"/>
+                <a:sym typeface="Calibri"/>
+              </a:rPr>
+              <a:t>Buy for these markers. </a:t>
+            </a:r>
+            <a:r>
+              <a:rPr cap="none" sz="1500" i="0" b="0" u="none" strike="noStrike">
+                <a:solidFill>
+                  <a:srgbClr val="3A2A1E">
+                    <a:alpha val="100000"/>
+                  </a:srgbClr>
+                </a:solidFill>
+                <a:latin typeface="Calibri"/>
+                <a:cs typeface="Calibri"/>
+                <a:ea typeface="Calibri"/>
+                <a:sym typeface="Calibri"/>
+              </a:rPr>
+              <a:t>This juicy, tropical, floral-resinous signature is the washed East African profile. When choosing between lots, let words like frankincense, elegantly, saturated break the tie.</a:t>
+            </a:r>
+          </a:p>
+        </p:txBody>
+      </p:sp>
+    </p:spTree>
+  </p:cSld>
+  <p:clrMapOvr>
+    <a:masterClrMapping/>
+  </p:clrMapOvr>
+</p:sld>
+</file>
+
+<file path=ppt/slides/slide7.xml><?xml version="1.0" encoding="utf-8"?>
+<p:sld xmlns:a="http://schemas.openxmlformats.org/drawingml/2006/main" xmlns:r="http://schemas.openxmlformats.org/officeDocument/2006/relationships" xmlns:p="http://schemas.openxmlformats.org/presentationml/2006/main">
+  <p:cSld>
+    <p:spTree>
+      <p:nvGrpSpPr>
+        <p:cNvPr id="1" name=""/>
+        <p:cNvGrpSpPr/>
+        <p:nvPr/>
+      </p:nvGrpSpPr>
+      <p:grpSpPr>
+        <a:xfrm>
+          <a:off x="0" y="0"/>
+          <a:ext cx="0" cy="0"/>
+          <a:chOff x="0" y="0"/>
+          <a:chExt cx="0" cy="0"/>
+        </a:xfrm>
+      </p:grpSpPr>
+      <p:sp>
+        <p:nvSpPr>
+          <p:cNvPr id="2" name=""/>
+          <p:cNvSpPr>
+            <a:spLocks noGrp="1"/>
+          </p:cNvSpPr>
+          <p:nvPr>
+            <p:ph/>
+          </p:nvPr>
+        </p:nvSpPr>
+        <p:spPr>
+          <a:xfrm>
+            <a:off x="457200" y="274320"/>
+            <a:ext cx="8229600" cy="274320"/>
+          </a:xfrm>
+        </p:spPr>
+        <p:txBody>
+          <a:bodyPr/>
+          <a:lstStyle/>
+          <a:p>
+            <a:pPr algn="l" marL="0" marR="0">
+              <a:lnSpc>
+                <a:spcPct val="100000"/>
+              </a:lnSpc>
+              <a:spcBef>
+                <a:spcPts val="0"/>
+              </a:spcBef>
+              <a:spcAft>
+                <a:spcPts val="0"/>
+              </a:spcAft>
+              <a:buNone/>
+            </a:pPr>
+            <a:r>
+              <a:rPr cap="none" sz="1200" i="0" b="1" u="none" strike="noStrike">
+                <a:solidFill>
+                  <a:srgbClr val="C75B39">
+                    <a:alpha val="100000"/>
+                  </a:srgbClr>
+                </a:solidFill>
+                <a:latin typeface="Calibri"/>
+                <a:cs typeface="Calibri"/>
+                <a:ea typeface="Calibri"/>
+                <a:sym typeface="Calibri"/>
+              </a:rPr>
               <a:t>RECOMMENDATION 4 · PREFERRED SUPPLIERS</a:t>
             </a:r>
           </a:p>
@@ -4337,7 +4487,7 @@
 </p:sld>
 </file>
 
-<file path=ppt/slides/slide7.xml><?xml version="1.0" encoding="utf-8"?>
+<file path=ppt/slides/slide8.xml><?xml version="1.0" encoding="utf-8"?>
 <p:sld xmlns:a="http://schemas.openxmlformats.org/drawingml/2006/main" xmlns:r="http://schemas.openxmlformats.org/officeDocument/2006/relationships" xmlns:p="http://schemas.openxmlformats.org/presentationml/2006/main">
   <p:cSld>
     <p:spTree>
@@ -5989,7 +6139,7 @@
 </p:sld>
 </file>
 
-<file path=ppt/slides/slide8.xml><?xml version="1.0" encoding="utf-8"?>
+<file path=ppt/slides/slide9.xml><?xml version="1.0" encoding="utf-8"?>
 <p:sld xmlns:a="http://schemas.openxmlformats.org/drawingml/2006/main" xmlns:r="http://schemas.openxmlformats.org/officeDocument/2006/relationships" xmlns:p="http://schemas.openxmlformats.org/presentationml/2006/main">
   <p:cSld>
     <p:spTree>
